--- a/Проектная работа/Презентация/Онлайн-магазин с использованием микросервисной архитектуры.pptx
+++ b/Проектная работа/Презентация/Онлайн-магазин с использованием микросервисной архитектуры.pptx
@@ -6,7 +6,7 @@
     <p:sldMasterId id="2147483663" r:id="rId2"/>
   </p:sldMasterIdLst>
   <p:notesMasterIdLst>
-    <p:notesMasterId r:id="rId23"/>
+    <p:notesMasterId r:id="rId22"/>
   </p:notesMasterIdLst>
   <p:sldIdLst>
     <p:sldId id="256" r:id="rId3"/>
@@ -16,29 +16,28 @@
     <p:sldId id="260" r:id="rId7"/>
     <p:sldId id="261" r:id="rId8"/>
     <p:sldId id="262" r:id="rId9"/>
-    <p:sldId id="263" r:id="rId10"/>
-    <p:sldId id="264" r:id="rId11"/>
-    <p:sldId id="265" r:id="rId12"/>
-    <p:sldId id="266" r:id="rId13"/>
-    <p:sldId id="267" r:id="rId14"/>
-    <p:sldId id="268" r:id="rId15"/>
+    <p:sldId id="267" r:id="rId10"/>
+    <p:sldId id="268" r:id="rId11"/>
+    <p:sldId id="263" r:id="rId12"/>
+    <p:sldId id="264" r:id="rId13"/>
+    <p:sldId id="265" r:id="rId14"/>
+    <p:sldId id="266" r:id="rId15"/>
     <p:sldId id="269" r:id="rId16"/>
-    <p:sldId id="270" r:id="rId17"/>
-    <p:sldId id="271" r:id="rId18"/>
-    <p:sldId id="272" r:id="rId19"/>
-    <p:sldId id="273" r:id="rId20"/>
-    <p:sldId id="274" r:id="rId21"/>
-    <p:sldId id="275" r:id="rId22"/>
+    <p:sldId id="271" r:id="rId17"/>
+    <p:sldId id="272" r:id="rId18"/>
+    <p:sldId id="273" r:id="rId19"/>
+    <p:sldId id="274" r:id="rId20"/>
+    <p:sldId id="275" r:id="rId21"/>
   </p:sldIdLst>
   <p:sldSz cx="9144000" cy="5143500" type="screen16x9"/>
   <p:notesSz cx="6858000" cy="9144000"/>
   <p:embeddedFontLst>
     <p:embeddedFont>
       <p:font typeface="Roboto" panose="02000000000000000000" pitchFamily="2" charset="0"/>
-      <p:regular r:id="rId24"/>
-      <p:bold r:id="rId25"/>
-      <p:italic r:id="rId26"/>
-      <p:boldItalic r:id="rId27"/>
+      <p:regular r:id="rId23"/>
+      <p:bold r:id="rId24"/>
+      <p:italic r:id="rId25"/>
+      <p:boldItalic r:id="rId26"/>
     </p:embeddedFont>
   </p:embeddedFontLst>
   <p:defaultTextStyle>
@@ -491,7 +490,7 @@
               <a:buNone/>
             </a:pPr>
             <a:r>
-              <a:t>- Проектная работа/Архитектура/MS/AuthMs.md; Проектная работа/Архитектура/ApiGateway.md</a:t>
+              <a:t>- Проектная работа/Архитектура/Sequence/Order Saga Success.md</a:t>
             </a:r>
           </a:p>
         </p:txBody>
@@ -642,7 +641,40 @@
           <a:bodyPr/>
           <a:lstStyle/>
           <a:p>
-            <a:endParaRPr/>
+            <a:pPr marL="0" lvl="0" indent="0" algn="l">
+              <a:lnSpc>
+                <a:spcPct val="100000"/>
+              </a:lnSpc>
+              <a:spcBef>
+                <a:spcPts val="0"/>
+              </a:spcBef>
+              <a:spcAft>
+                <a:spcPts val="0"/>
+              </a:spcAft>
+              <a:buSzPts val="1100"/>
+              <a:buNone/>
+            </a:pPr>
+            <a:r>
+              <a:t>[Sources]</a:t>
+            </a:r>
+          </a:p>
+          <a:p>
+            <a:pPr marL="0" lvl="0" indent="0" algn="l">
+              <a:lnSpc>
+                <a:spcPct val="100000"/>
+              </a:lnSpc>
+              <a:spcBef>
+                <a:spcPts val="0"/>
+              </a:spcBef>
+              <a:spcAft>
+                <a:spcPts val="0"/>
+              </a:spcAft>
+              <a:buSzPts val="1100"/>
+              <a:buNone/>
+            </a:pPr>
+            <a:r>
+              <a:t>- Проектная работа/Архитектура/MS/AuthMs.md; Проектная работа/Архитектура/ApiGateway.md</a:t>
+            </a:r>
           </a:p>
         </p:txBody>
       </p:sp>
@@ -932,7 +964,7 @@
               <a:buNone/>
             </a:pPr>
             <a:r>
-              <a:t>- Проектная работа/Архитектура/MS/CatalogMs.md; Проектная работа/K8s/README.md</a:t>
+              <a:t>- Проектная работа/Postman/Observability/README.md</a:t>
             </a:r>
           </a:p>
         </p:txBody>
@@ -1040,7 +1072,7 @@
               <a:buNone/>
             </a:pPr>
             <a:r>
-              <a:t>- Проектная работа/Postman/Observability/README.md</a:t>
+              <a:t>- Проектная работа/Архитектура/README.md</a:t>
             </a:r>
           </a:p>
         </p:txBody>
@@ -1148,7 +1180,7 @@
               <a:buNone/>
             </a:pPr>
             <a:r>
-              <a:t>- Проектная работа/Архитектура/README.md</a:t>
+              <a:t>- Проектная работа/README.md</a:t>
             </a:r>
           </a:p>
         </p:txBody>
@@ -1224,40 +1256,7 @@
           <a:bodyPr/>
           <a:lstStyle/>
           <a:p>
-            <a:pPr marL="0" lvl="0" indent="0" algn="l">
-              <a:lnSpc>
-                <a:spcPct val="100000"/>
-              </a:lnSpc>
-              <a:spcBef>
-                <a:spcPts val="0"/>
-              </a:spcBef>
-              <a:spcAft>
-                <a:spcPts val="0"/>
-              </a:spcAft>
-              <a:buSzPts val="1100"/>
-              <a:buNone/>
-            </a:pPr>
-            <a:r>
-              <a:t>[Sources]</a:t>
-            </a:r>
-          </a:p>
-          <a:p>
-            <a:pPr marL="0" lvl="0" indent="0" algn="l">
-              <a:lnSpc>
-                <a:spcPct val="100000"/>
-              </a:lnSpc>
-              <a:spcBef>
-                <a:spcPts val="0"/>
-              </a:spcBef>
-              <a:spcAft>
-                <a:spcPts val="0"/>
-              </a:spcAft>
-              <a:buSzPts val="1100"/>
-              <a:buNone/>
-            </a:pPr>
-            <a:r>
-              <a:t>- Проектная работа/README.md</a:t>
-            </a:r>
+            <a:endParaRPr/>
           </a:p>
         </p:txBody>
       </p:sp>
@@ -1332,81 +1331,6 @@
           <a:bodyPr/>
           <a:lstStyle/>
           <a:p>
-            <a:endParaRPr/>
-          </a:p>
-        </p:txBody>
-      </p:sp>
-      <p:sp>
-        <p:nvSpPr>
-          <p:cNvPr id="4" name="Slide Number Placeholder 3"/>
-          <p:cNvSpPr>
-            <a:spLocks noGrp="1"/>
-          </p:cNvSpPr>
-          <p:nvPr>
-            <p:ph type="sldNum" idx="5"/>
-          </p:nvPr>
-        </p:nvSpPr>
-        <p:spPr/>
-        <p:txBody>
-          <a:bodyPr/>
-          <a:lstStyle/>
-          <a:p>
-            <a:endParaRPr/>
-          </a:p>
-        </p:txBody>
-      </p:sp>
-    </p:spTree>
-  </p:cSld>
-  <p:clrMapOvr>
-    <a:masterClrMapping/>
-  </p:clrMapOvr>
-</p:notes>
-</file>
-
-<file path=ppt/notesSlides/notesSlide2.xml><?xml version="1.0" encoding="utf-8"?>
-<p:notes xmlns:a="http://schemas.openxmlformats.org/drawingml/2006/main" xmlns:r="http://schemas.openxmlformats.org/officeDocument/2006/relationships" xmlns:p="http://schemas.openxmlformats.org/presentationml/2006/main">
-  <p:cSld>
-    <p:spTree>
-      <p:nvGrpSpPr>
-        <p:cNvPr id="1" name=""/>
-        <p:cNvGrpSpPr/>
-        <p:nvPr/>
-      </p:nvGrpSpPr>
-      <p:grpSpPr>
-        <a:xfrm>
-          <a:off x="0" y="0"/>
-          <a:ext cx="0" cy="0"/>
-          <a:chOff x="0" y="0"/>
-          <a:chExt cx="0" cy="0"/>
-        </a:xfrm>
-      </p:grpSpPr>
-      <p:sp>
-        <p:nvSpPr>
-          <p:cNvPr id="2" name="Slide Image Placeholder 1"/>
-          <p:cNvSpPr>
-            <a:spLocks noGrp="1" noRot="1" noChangeAspect="1"/>
-          </p:cNvSpPr>
-          <p:nvPr>
-            <p:ph type="sldImg"/>
-          </p:nvPr>
-        </p:nvSpPr>
-        <p:spPr/>
-      </p:sp>
-      <p:sp>
-        <p:nvSpPr>
-          <p:cNvPr id="3" name="Notes Placeholder 2"/>
-          <p:cNvSpPr>
-            <a:spLocks noGrp="1"/>
-          </p:cNvSpPr>
-          <p:nvPr>
-            <p:ph type="body" idx="1"/>
-          </p:nvPr>
-        </p:nvSpPr>
-        <p:spPr/>
-        <p:txBody>
-          <a:bodyPr/>
-          <a:lstStyle/>
-          <a:p>
             <a:pPr marL="0" lvl="0" indent="0" algn="l">
               <a:lnSpc>
                 <a:spcPct val="100000"/>
@@ -1471,7 +1395,7 @@
 </p:notes>
 </file>
 
-<file path=ppt/notesSlides/notesSlide20.xml><?xml version="1.0" encoding="utf-8"?>
+<file path=ppt/notesSlides/notesSlide2.xml><?xml version="1.0" encoding="utf-8"?>
 <p:notes xmlns:a="http://schemas.openxmlformats.org/drawingml/2006/main" xmlns:r="http://schemas.openxmlformats.org/officeDocument/2006/relationships" xmlns:p="http://schemas.openxmlformats.org/presentationml/2006/main">
   <p:cSld>
     <p:spTree>
@@ -2163,40 +2087,7 @@
           <a:bodyPr/>
           <a:lstStyle/>
           <a:p>
-            <a:pPr marL="0" lvl="0" indent="0" algn="l">
-              <a:lnSpc>
-                <a:spcPct val="100000"/>
-              </a:lnSpc>
-              <a:spcBef>
-                <a:spcPts val="0"/>
-              </a:spcBef>
-              <a:spcAft>
-                <a:spcPts val="0"/>
-              </a:spcAft>
-              <a:buSzPts val="1100"/>
-              <a:buNone/>
-            </a:pPr>
-            <a:r>
-              <a:t>[Sources]</a:t>
-            </a:r>
-          </a:p>
-          <a:p>
-            <a:pPr marL="0" lvl="0" indent="0" algn="l">
-              <a:lnSpc>
-                <a:spcPct val="100000"/>
-              </a:lnSpc>
-              <a:spcBef>
-                <a:spcPts val="0"/>
-              </a:spcBef>
-              <a:spcAft>
-                <a:spcPts val="0"/>
-              </a:spcAft>
-              <a:buSzPts val="1100"/>
-              <a:buNone/>
-            </a:pPr>
-            <a:r>
-              <a:t>- Проектная работа/Архитектура/Sequence/Order Saga Success.md</a:t>
-            </a:r>
+            <a:endParaRPr/>
           </a:p>
         </p:txBody>
       </p:sp>
@@ -19197,6 +19088,210 @@
           <a:chExt cx="0" cy="0"/>
         </a:xfrm>
       </p:grpSpPr>
+      <p:sp>
+        <p:nvSpPr>
+          <p:cNvPr id="3" name="slide-title">
+            <a:extLst>
+              <a:ext uri="{FF2B5EF4-FFF2-40B4-BE49-F238E27FC236}">
+                <a16:creationId xmlns:a16="http://schemas.microsoft.com/office/drawing/2014/main" id="{C3A7F53A-B751-4BF4-A0DA-3366DE0898E7}"/>
+              </a:ext>
+            </a:extLst>
+          </p:cNvPr>
+          <p:cNvSpPr>
+            <a:spLocks noGrp="1"/>
+          </p:cNvSpPr>
+          <p:nvPr/>
+        </p:nvSpPr>
+        <p:spPr>
+          <a:xfrm>
+            <a:off x="500539" y="330708"/>
+            <a:ext cx="8520589" cy="685800"/>
+          </a:xfrm>
+          <a:prstGeom prst="rect">
+            <a:avLst/>
+          </a:prstGeom>
+          <a:noFill/>
+          <a:ln w="0">
+            <a:noFill/>
+            <a:prstDash val="solid"/>
+          </a:ln>
+        </p:spPr>
+        <p:txBody>
+          <a:bodyPr/>
+          <a:lstStyle/>
+          <a:p>
+            <a:pPr algn="l">
+              <a:defRPr sz="3000">
+                <a:solidFill>
+                  <a:srgbClr val="000000"/>
+                </a:solidFill>
+              </a:defRPr>
+            </a:pPr>
+            <a:r>
+              <a:rPr sz="3000">
+                <a:solidFill>
+                  <a:srgbClr val="000000"/>
+                </a:solidFill>
+              </a:rPr>
+              <a:t>Оформление заказа: создание заказа</a:t>
+            </a:r>
+          </a:p>
+        </p:txBody>
+      </p:sp>
+      <p:pic>
+        <p:nvPicPr>
+          <p:cNvPr id="4" name="Рисунок 3"/>
+          <p:cNvPicPr>
+            <a:picLocks noChangeAspect="1"/>
+          </p:cNvPicPr>
+          <p:nvPr/>
+        </p:nvPicPr>
+        <p:blipFill>
+          <a:blip r:embed="rId3"/>
+          <a:stretch/>
+        </p:blipFill>
+        <p:spPr>
+          <a:xfrm>
+            <a:off x="523875" y="1328083"/>
+            <a:ext cx="8096250" cy="3049309"/>
+          </a:xfrm>
+          <a:prstGeom prst="rect">
+            <a:avLst/>
+          </a:prstGeom>
+        </p:spPr>
+      </p:pic>
+    </p:spTree>
+    <p:extLst>
+      <p:ext uri="{BB962C8B-B14F-4D97-AF65-F5344CB8AC3E}">
+        <p14:creationId xmlns:p14="http://schemas.microsoft.com/office/powerpoint/2010/main" val="378756689"/>
+      </p:ext>
+    </p:extLst>
+  </p:cSld>
+  <p:clrMapOvr>
+    <a:masterClrMapping/>
+  </p:clrMapOvr>
+</p:sld>
+</file>
+
+<file path=ppt/slides/slide11.xml><?xml version="1.0" encoding="utf-8"?>
+<p:sld xmlns:a="http://schemas.openxmlformats.org/drawingml/2006/main" xmlns:r="http://schemas.openxmlformats.org/officeDocument/2006/relationships" xmlns:p="http://schemas.openxmlformats.org/presentationml/2006/main">
+  <p:cSld>
+    <p:spTree>
+      <p:nvGrpSpPr>
+        <p:cNvPr id="1" name=""/>
+        <p:cNvGrpSpPr/>
+        <p:nvPr/>
+      </p:nvGrpSpPr>
+      <p:grpSpPr>
+        <a:xfrm>
+          <a:off x="0" y="0"/>
+          <a:ext cx="0" cy="0"/>
+          <a:chOff x="0" y="0"/>
+          <a:chExt cx="0" cy="0"/>
+        </a:xfrm>
+      </p:grpSpPr>
+      <p:pic>
+        <p:nvPicPr>
+          <p:cNvPr id="3" name="Рисунок 2"/>
+          <p:cNvPicPr>
+            <a:picLocks noChangeAspect="1"/>
+          </p:cNvPicPr>
+          <p:nvPr/>
+        </p:nvPicPr>
+        <p:blipFill>
+          <a:blip r:embed="rId3"/>
+          <a:stretch/>
+        </p:blipFill>
+        <p:spPr>
+          <a:xfrm>
+            <a:off x="952500" y="1624120"/>
+            <a:ext cx="7239000" cy="2371510"/>
+          </a:xfrm>
+          <a:prstGeom prst="rect">
+            <a:avLst/>
+          </a:prstGeom>
+        </p:spPr>
+      </p:pic>
+      <p:sp>
+        <p:nvSpPr>
+          <p:cNvPr id="2" name="slide-title">
+            <a:extLst>
+              <a:ext uri="{FF2B5EF4-FFF2-40B4-BE49-F238E27FC236}">
+                <a16:creationId xmlns:a16="http://schemas.microsoft.com/office/drawing/2014/main" id="{756AD2C2-2279-43DD-ABCB-567197FD97BF}"/>
+              </a:ext>
+            </a:extLst>
+          </p:cNvPr>
+          <p:cNvSpPr>
+            <a:spLocks noGrp="1"/>
+          </p:cNvSpPr>
+          <p:nvPr/>
+        </p:nvSpPr>
+        <p:spPr>
+          <a:xfrm>
+            <a:off x="500539" y="330708"/>
+            <a:ext cx="8520589" cy="685800"/>
+          </a:xfrm>
+          <a:prstGeom prst="rect">
+            <a:avLst/>
+          </a:prstGeom>
+          <a:noFill/>
+          <a:ln w="0">
+            <a:noFill/>
+            <a:prstDash val="solid"/>
+          </a:ln>
+        </p:spPr>
+        <p:txBody>
+          <a:bodyPr/>
+          <a:lstStyle/>
+          <a:p>
+            <a:pPr algn="l">
+              <a:defRPr sz="3000">
+                <a:solidFill>
+                  <a:srgbClr val="000000"/>
+                </a:solidFill>
+              </a:defRPr>
+            </a:pPr>
+            <a:r>
+              <a:rPr sz="3000">
+                <a:solidFill>
+                  <a:srgbClr val="000000"/>
+                </a:solidFill>
+              </a:rPr>
+              <a:t>Оформление заказа: проверка статуса</a:t>
+            </a:r>
+          </a:p>
+        </p:txBody>
+      </p:sp>
+    </p:spTree>
+    <p:extLst>
+      <p:ext uri="{BB962C8B-B14F-4D97-AF65-F5344CB8AC3E}">
+        <p14:creationId xmlns:p14="http://schemas.microsoft.com/office/powerpoint/2010/main" val="1145137990"/>
+      </p:ext>
+    </p:extLst>
+  </p:cSld>
+  <p:clrMapOvr>
+    <a:masterClrMapping/>
+  </p:clrMapOvr>
+</p:sld>
+</file>
+
+<file path=ppt/slides/slide12.xml><?xml version="1.0" encoding="utf-8"?>
+<p:sld xmlns:a="http://schemas.openxmlformats.org/drawingml/2006/main" xmlns:r="http://schemas.openxmlformats.org/officeDocument/2006/relationships" xmlns:p="http://schemas.openxmlformats.org/presentationml/2006/main">
+  <p:cSld>
+    <p:spTree>
+      <p:nvGrpSpPr>
+        <p:cNvPr id="1" name=""/>
+        <p:cNvGrpSpPr/>
+        <p:nvPr/>
+      </p:nvGrpSpPr>
+      <p:grpSpPr>
+        <a:xfrm>
+          <a:off x="0" y="0"/>
+          <a:ext cx="0" cy="0"/>
+          <a:chOff x="0" y="0"/>
+          <a:chExt cx="0" cy="0"/>
+        </a:xfrm>
+      </p:grpSpPr>
       <p:pic>
         <p:nvPicPr>
           <p:cNvPr id="4" name="Рисунок 3"/>
@@ -19282,7 +19377,7 @@
 </p:sld>
 </file>
 
-<file path=ppt/slides/slide11.xml><?xml version="1.0" encoding="utf-8"?>
+<file path=ppt/slides/slide13.xml><?xml version="1.0" encoding="utf-8"?>
 <p:sld xmlns:a="http://schemas.openxmlformats.org/drawingml/2006/main" xmlns:r="http://schemas.openxmlformats.org/officeDocument/2006/relationships" xmlns:p="http://schemas.openxmlformats.org/presentationml/2006/main">
   <p:cSld>
     <p:spTree>
@@ -19384,210 +19479,6 @@
 </p:sld>
 </file>
 
-<file path=ppt/slides/slide12.xml><?xml version="1.0" encoding="utf-8"?>
-<p:sld xmlns:a="http://schemas.openxmlformats.org/drawingml/2006/main" xmlns:r="http://schemas.openxmlformats.org/officeDocument/2006/relationships" xmlns:p="http://schemas.openxmlformats.org/presentationml/2006/main">
-  <p:cSld>
-    <p:spTree>
-      <p:nvGrpSpPr>
-        <p:cNvPr id="1" name=""/>
-        <p:cNvGrpSpPr/>
-        <p:nvPr/>
-      </p:nvGrpSpPr>
-      <p:grpSpPr>
-        <a:xfrm>
-          <a:off x="0" y="0"/>
-          <a:ext cx="0" cy="0"/>
-          <a:chOff x="0" y="0"/>
-          <a:chExt cx="0" cy="0"/>
-        </a:xfrm>
-      </p:grpSpPr>
-      <p:pic>
-        <p:nvPicPr>
-          <p:cNvPr id="4" name="Рисунок 3"/>
-          <p:cNvPicPr>
-            <a:picLocks noChangeAspect="1"/>
-          </p:cNvPicPr>
-          <p:nvPr/>
-        </p:nvPicPr>
-        <p:blipFill>
-          <a:blip r:embed="rId3"/>
-          <a:stretch/>
-        </p:blipFill>
-        <p:spPr>
-          <a:xfrm>
-            <a:off x="982325" y="1066800"/>
-            <a:ext cx="7179350" cy="3571875"/>
-          </a:xfrm>
-          <a:prstGeom prst="rect">
-            <a:avLst/>
-          </a:prstGeom>
-        </p:spPr>
-      </p:pic>
-      <p:sp>
-        <p:nvSpPr>
-          <p:cNvPr id="3" name="slide-title-top">
-            <a:extLst>
-              <a:ext uri="{FF2B5EF4-FFF2-40B4-BE49-F238E27FC236}">
-                <a16:creationId xmlns:a16="http://schemas.microsoft.com/office/drawing/2014/main" id="{44BABCB1-AE3B-4BFD-88E2-2C1C6A41954E}"/>
-              </a:ext>
-            </a:extLst>
-          </p:cNvPr>
-          <p:cNvSpPr>
-            <a:spLocks noGrp="1"/>
-          </p:cNvSpPr>
-          <p:nvPr/>
-        </p:nvSpPr>
-        <p:spPr>
-          <a:xfrm>
-            <a:off x="500539" y="330708"/>
-            <a:ext cx="8520589" cy="685800"/>
-          </a:xfrm>
-          <a:prstGeom prst="rect">
-            <a:avLst/>
-          </a:prstGeom>
-          <a:noFill/>
-          <a:ln w="0">
-            <a:noFill/>
-            <a:prstDash val="solid"/>
-          </a:ln>
-        </p:spPr>
-        <p:txBody>
-          <a:bodyPr/>
-          <a:lstStyle/>
-          <a:p>
-            <a:pPr algn="l">
-              <a:defRPr sz="3000">
-                <a:solidFill>
-                  <a:srgbClr val="000000"/>
-                </a:solidFill>
-              </a:defRPr>
-            </a:pPr>
-            <a:r>
-              <a:rPr sz="3000">
-                <a:solidFill>
-                  <a:srgbClr val="000000"/>
-                </a:solidFill>
-              </a:rPr>
-              <a:t>Регистрация пользователя</a:t>
-            </a:r>
-          </a:p>
-        </p:txBody>
-      </p:sp>
-    </p:spTree>
-    <p:extLst>
-      <p:ext uri="{BB962C8B-B14F-4D97-AF65-F5344CB8AC3E}">
-        <p14:creationId xmlns:p14="http://schemas.microsoft.com/office/powerpoint/2010/main" val="1932806430"/>
-      </p:ext>
-    </p:extLst>
-  </p:cSld>
-  <p:clrMapOvr>
-    <a:masterClrMapping/>
-  </p:clrMapOvr>
-</p:sld>
-</file>
-
-<file path=ppt/slides/slide13.xml><?xml version="1.0" encoding="utf-8"?>
-<p:sld xmlns:a="http://schemas.openxmlformats.org/drawingml/2006/main" xmlns:r="http://schemas.openxmlformats.org/officeDocument/2006/relationships" xmlns:p="http://schemas.openxmlformats.org/presentationml/2006/main">
-  <p:cSld>
-    <p:spTree>
-      <p:nvGrpSpPr>
-        <p:cNvPr id="1" name=""/>
-        <p:cNvGrpSpPr/>
-        <p:nvPr/>
-      </p:nvGrpSpPr>
-      <p:grpSpPr>
-        <a:xfrm>
-          <a:off x="0" y="0"/>
-          <a:ext cx="0" cy="0"/>
-          <a:chOff x="0" y="0"/>
-          <a:chExt cx="0" cy="0"/>
-        </a:xfrm>
-      </p:grpSpPr>
-      <p:pic>
-        <p:nvPicPr>
-          <p:cNvPr id="3" name="Рисунок 2"/>
-          <p:cNvPicPr>
-            <a:picLocks noChangeAspect="1"/>
-          </p:cNvPicPr>
-          <p:nvPr/>
-        </p:nvPicPr>
-        <p:blipFill>
-          <a:blip r:embed="rId3"/>
-          <a:stretch/>
-        </p:blipFill>
-        <p:spPr>
-          <a:xfrm>
-            <a:off x="1428750" y="1844877"/>
-            <a:ext cx="6286500" cy="1929996"/>
-          </a:xfrm>
-          <a:prstGeom prst="rect">
-            <a:avLst/>
-          </a:prstGeom>
-        </p:spPr>
-      </p:pic>
-      <p:sp>
-        <p:nvSpPr>
-          <p:cNvPr id="2" name="slide-title">
-            <a:extLst>
-              <a:ext uri="{FF2B5EF4-FFF2-40B4-BE49-F238E27FC236}">
-                <a16:creationId xmlns:a16="http://schemas.microsoft.com/office/drawing/2014/main" id="{49B82C0D-E5DA-42BE-80E6-842A8071824B}"/>
-              </a:ext>
-            </a:extLst>
-          </p:cNvPr>
-          <p:cNvSpPr>
-            <a:spLocks noGrp="1"/>
-          </p:cNvSpPr>
-          <p:nvPr/>
-        </p:nvSpPr>
-        <p:spPr>
-          <a:xfrm>
-            <a:off x="500539" y="330708"/>
-            <a:ext cx="8520589" cy="685800"/>
-          </a:xfrm>
-          <a:prstGeom prst="rect">
-            <a:avLst/>
-          </a:prstGeom>
-          <a:noFill/>
-          <a:ln w="0">
-            <a:noFill/>
-            <a:prstDash val="solid"/>
-          </a:ln>
-        </p:spPr>
-        <p:txBody>
-          <a:bodyPr/>
-          <a:lstStyle/>
-          <a:p>
-            <a:pPr algn="l">
-              <a:defRPr sz="3000">
-                <a:solidFill>
-                  <a:srgbClr val="000000"/>
-                </a:solidFill>
-              </a:defRPr>
-            </a:pPr>
-            <a:r>
-              <a:rPr sz="3000">
-                <a:solidFill>
-                  <a:srgbClr val="000000"/>
-                </a:solidFill>
-              </a:rPr>
-              <a:t>Создание счёта после регистрации</a:t>
-            </a:r>
-          </a:p>
-        </p:txBody>
-      </p:sp>
-    </p:spTree>
-    <p:extLst>
-      <p:ext uri="{BB962C8B-B14F-4D97-AF65-F5344CB8AC3E}">
-        <p14:creationId xmlns:p14="http://schemas.microsoft.com/office/powerpoint/2010/main" val="314297881"/>
-      </p:ext>
-    </p:extLst>
-  </p:cSld>
-  <p:clrMapOvr>
-    <a:masterClrMapping/>
-  </p:clrMapOvr>
-</p:sld>
-</file>
-
 <file path=ppt/slides/slide14.xml><?xml version="1.0" encoding="utf-8"?>
 <p:sld xmlns:a="http://schemas.openxmlformats.org/drawingml/2006/main" xmlns:r="http://schemas.openxmlformats.org/officeDocument/2006/relationships" xmlns:p="http://schemas.openxmlformats.org/presentationml/2006/main">
   <p:cSld>
@@ -20151,550 +20042,6 @@
 </file>
 
 <file path=ppt/slides/slide15.xml><?xml version="1.0" encoding="utf-8"?>
-<p:sld xmlns:a="http://schemas.openxmlformats.org/drawingml/2006/main" xmlns:r="http://schemas.openxmlformats.org/officeDocument/2006/relationships" xmlns:p="http://schemas.openxmlformats.org/presentationml/2006/main">
-  <p:cSld>
-    <p:spTree>
-      <p:nvGrpSpPr>
-        <p:cNvPr id="1" name=""/>
-        <p:cNvGrpSpPr/>
-        <p:nvPr/>
-      </p:nvGrpSpPr>
-      <p:grpSpPr>
-        <a:xfrm>
-          <a:off x="0" y="0"/>
-          <a:ext cx="0" cy="0"/>
-          <a:chOff x="0" y="0"/>
-          <a:chExt cx="0" cy="0"/>
-        </a:xfrm>
-      </p:grpSpPr>
-      <p:sp>
-        <p:nvSpPr>
-          <p:cNvPr id="197" name="Google Shape;197;g33cef942d38_2_11">
-            <a:extLst>
-              <a:ext uri="{FF2B5EF4-FFF2-40B4-BE49-F238E27FC236}">
-                <a16:creationId xmlns:a16="http://schemas.microsoft.com/office/drawing/2014/main" id="{8F8855D2-3B9B-4B72-8FC5-C58D50BF2A20}"/>
-              </a:ext>
-            </a:extLst>
-          </p:cNvPr>
-          <p:cNvSpPr>
-            <a:spLocks noGrp="1"/>
-          </p:cNvSpPr>
-          <p:nvPr>
-            <p:ph type="title"/>
-          </p:nvPr>
-        </p:nvSpPr>
-        <p:spPr>
-          <a:xfrm>
-            <a:off x="500550" y="330724"/>
-            <a:ext cx="8520600" cy="1095900"/>
-          </a:xfrm>
-          <a:prstGeom prst="rect">
-            <a:avLst/>
-          </a:prstGeom>
-          <a:noFill/>
-          <a:ln>
-            <a:noFill/>
-          </a:ln>
-        </p:spPr>
-        <p:txBody>
-          <a:bodyPr spcFirstLastPara="1" wrap="square" lIns="91425" tIns="91425" rIns="91425" bIns="91425" anchor="t">
-            <a:noAutofit/>
-          </a:bodyPr>
-          <a:lstStyle/>
-          <a:p>
-            <a:pPr marL="0" lvl="0" indent="0" algn="l">
-              <a:lnSpc>
-                <a:spcPct val="100000"/>
-              </a:lnSpc>
-              <a:spcBef>
-                <a:spcPts val="0"/>
-              </a:spcBef>
-              <a:spcAft>
-                <a:spcPts val="0"/>
-              </a:spcAft>
-              <a:buSzPts val="3100"/>
-              <a:buNone/>
-            </a:pPr>
-            <a:r>
-              <a:rPr sz="3000" dirty="0" err="1"/>
-              <a:t>Схема</a:t>
-            </a:r>
-            <a:r>
-              <a:rPr sz="3000" dirty="0"/>
-              <a:t> </a:t>
-            </a:r>
-            <a:r>
-              <a:rPr sz="3000" dirty="0" err="1"/>
-              <a:t>хранения</a:t>
-            </a:r>
-            <a:r>
-              <a:rPr sz="3000" dirty="0"/>
-              <a:t> </a:t>
-            </a:r>
-            <a:r>
-              <a:rPr sz="3000" dirty="0" err="1"/>
-              <a:t>данных</a:t>
-            </a:r>
-            <a:endParaRPr sz="3000" dirty="0"/>
-          </a:p>
-          <a:p>
-            <a:pPr marL="0" lvl="0" indent="0" algn="l">
-              <a:lnSpc>
-                <a:spcPct val="100000"/>
-              </a:lnSpc>
-              <a:spcBef>
-                <a:spcPts val="0"/>
-              </a:spcBef>
-              <a:spcAft>
-                <a:spcPts val="0"/>
-              </a:spcAft>
-              <a:buSzPts val="3100"/>
-              <a:buNone/>
-            </a:pPr>
-            <a:endParaRPr sz="3000" dirty="0"/>
-          </a:p>
-          <a:p>
-            <a:pPr marL="0" lvl="0" indent="0" algn="l">
-              <a:lnSpc>
-                <a:spcPct val="100000"/>
-              </a:lnSpc>
-              <a:spcBef>
-                <a:spcPts val="0"/>
-              </a:spcBef>
-              <a:spcAft>
-                <a:spcPts val="0"/>
-              </a:spcAft>
-              <a:buSzPts val="3100"/>
-              <a:buNone/>
-            </a:pPr>
-            <a:endParaRPr sz="3000" dirty="0"/>
-          </a:p>
-          <a:p>
-            <a:pPr marL="0" lvl="0" indent="0" algn="l">
-              <a:lnSpc>
-                <a:spcPct val="100000"/>
-              </a:lnSpc>
-              <a:spcBef>
-                <a:spcPts val="0"/>
-              </a:spcBef>
-              <a:spcAft>
-                <a:spcPts val="0"/>
-              </a:spcAft>
-              <a:buSzPts val="3100"/>
-              <a:buNone/>
-            </a:pPr>
-            <a:endParaRPr sz="3000" dirty="0"/>
-          </a:p>
-        </p:txBody>
-      </p:sp>
-      <p:sp>
-        <p:nvSpPr>
-          <p:cNvPr id="199" name="Прямоугольник: скругленные углы 198">
-            <a:extLst>
-              <a:ext uri="{FF2B5EF4-FFF2-40B4-BE49-F238E27FC236}">
-                <a16:creationId xmlns:a16="http://schemas.microsoft.com/office/drawing/2014/main" id="{7204CE59-288E-41E4-98E9-27A016C2CC1B}"/>
-              </a:ext>
-            </a:extLst>
-          </p:cNvPr>
-          <p:cNvSpPr>
-            <a:spLocks noGrp="1"/>
-          </p:cNvSpPr>
-          <p:nvPr/>
-        </p:nvSpPr>
-        <p:spPr>
-          <a:xfrm>
-            <a:off x="619125" y="1476375"/>
-            <a:ext cx="2238375" cy="2190750"/>
-          </a:xfrm>
-          <a:prstGeom prst="roundRect">
-            <a:avLst>
-              <a:gd name="adj" fmla="val 2609"/>
-            </a:avLst>
-          </a:prstGeom>
-          <a:solidFill>
-            <a:srgbClr val="E3F2FD"/>
-          </a:solidFill>
-          <a:ln w="19050">
-            <a:solidFill>
-              <a:srgbClr val="1976D2"/>
-            </a:solidFill>
-            <a:prstDash val="solid"/>
-          </a:ln>
-        </p:spPr>
-        <p:txBody>
-          <a:bodyPr anchor="ctr"/>
-          <a:lstStyle/>
-          <a:p>
-            <a:pPr algn="ctr">
-              <a:buNone/>
-              <a:defRPr sz="1425" b="1">
-                <a:solidFill>
-                  <a:srgbClr val="1E1E1E"/>
-                </a:solidFill>
-              </a:defRPr>
-            </a:pPr>
-            <a:r>
-              <a:rPr sz="1425" b="1">
-                <a:solidFill>
-                  <a:srgbClr val="1E1E1E"/>
-                </a:solidFill>
-              </a:rPr>
-              <a:t>7 микросервисов</a:t>
-            </a:r>
-          </a:p>
-          <a:p>
-            <a:endParaRPr sz="1425" b="1">
-              <a:solidFill>
-                <a:srgbClr val="1E1E1E"/>
-              </a:solidFill>
-            </a:endParaRPr>
-          </a:p>
-          <a:p>
-            <a:pPr algn="ctr">
-              <a:buNone/>
-              <a:defRPr sz="1425" b="1">
-                <a:solidFill>
-                  <a:srgbClr val="1E1E1E"/>
-                </a:solidFill>
-              </a:defRPr>
-            </a:pPr>
-            <a:r>
-              <a:rPr sz="1425" b="1">
-                <a:solidFill>
-                  <a:srgbClr val="1E1E1E"/>
-                </a:solidFill>
-              </a:rPr>
-              <a:t>Отдельные логические БД</a:t>
-            </a:r>
-          </a:p>
-          <a:p>
-            <a:pPr algn="ctr">
-              <a:buNone/>
-              <a:defRPr sz="1425" b="1">
-                <a:solidFill>
-                  <a:srgbClr val="1E1E1E"/>
-                </a:solidFill>
-              </a:defRPr>
-            </a:pPr>
-            <a:r>
-              <a:rPr sz="1425" b="1">
-                <a:solidFill>
-                  <a:srgbClr val="1E1E1E"/>
-                </a:solidFill>
-              </a:rPr>
-              <a:t>в общем PostgreSQL</a:t>
-            </a:r>
-          </a:p>
-        </p:txBody>
-      </p:sp>
-      <p:sp>
-        <p:nvSpPr>
-          <p:cNvPr id="200" name="Прямоугольник: скругленные углы 199">
-            <a:extLst>
-              <a:ext uri="{FF2B5EF4-FFF2-40B4-BE49-F238E27FC236}">
-                <a16:creationId xmlns:a16="http://schemas.microsoft.com/office/drawing/2014/main" id="{C819AF59-052E-4F63-A9B8-D7ECDA9BA413}"/>
-              </a:ext>
-            </a:extLst>
-          </p:cNvPr>
-          <p:cNvSpPr>
-            <a:spLocks noGrp="1"/>
-          </p:cNvSpPr>
-          <p:nvPr/>
-        </p:nvSpPr>
-        <p:spPr>
-          <a:xfrm>
-            <a:off x="3429000" y="1476375"/>
-            <a:ext cx="2238375" cy="2190750"/>
-          </a:xfrm>
-          <a:prstGeom prst="roundRect">
-            <a:avLst>
-              <a:gd name="adj" fmla="val 2609"/>
-            </a:avLst>
-          </a:prstGeom>
-          <a:solidFill>
-            <a:srgbClr val="FFF8E1"/>
-          </a:solidFill>
-          <a:ln w="19050">
-            <a:solidFill>
-              <a:srgbClr val="FF8A00"/>
-            </a:solidFill>
-            <a:prstDash val="solid"/>
-          </a:ln>
-        </p:spPr>
-        <p:txBody>
-          <a:bodyPr anchor="ctr"/>
-          <a:lstStyle/>
-          <a:p>
-            <a:pPr algn="ctr">
-              <a:buNone/>
-              <a:defRPr sz="1425" b="1">
-                <a:solidFill>
-                  <a:srgbClr val="1E1E1E"/>
-                </a:solidFill>
-              </a:defRPr>
-            </a:pPr>
-            <a:r>
-              <a:rPr sz="1425" b="1">
-                <a:solidFill>
-                  <a:srgbClr val="1E1E1E"/>
-                </a:solidFill>
-              </a:rPr>
-              <a:t>CatalogMs</a:t>
-            </a:r>
-          </a:p>
-          <a:p>
-            <a:endParaRPr sz="1425" b="1">
-              <a:solidFill>
-                <a:srgbClr val="1E1E1E"/>
-              </a:solidFill>
-            </a:endParaRPr>
-          </a:p>
-          <a:p>
-            <a:pPr algn="ctr">
-              <a:buNone/>
-              <a:defRPr sz="1425" b="1">
-                <a:solidFill>
-                  <a:srgbClr val="1E1E1E"/>
-                </a:solidFill>
-              </a:defRPr>
-            </a:pPr>
-            <a:r>
-              <a:rPr sz="1425" b="1">
-                <a:solidFill>
-                  <a:srgbClr val="1E1E1E"/>
-                </a:solidFill>
-              </a:rPr>
-              <a:t>PostgreSQL Primary</a:t>
-            </a:r>
-          </a:p>
-          <a:p>
-            <a:pPr algn="ctr">
-              <a:buNone/>
-              <a:defRPr sz="1425" b="1">
-                <a:solidFill>
-                  <a:srgbClr val="1E1E1E"/>
-                </a:solidFill>
-              </a:defRPr>
-            </a:pPr>
-            <a:r>
-              <a:rPr sz="1425" b="1">
-                <a:solidFill>
-                  <a:srgbClr val="1E1E1E"/>
-                </a:solidFill>
-              </a:rPr>
-              <a:t>+</a:t>
-            </a:r>
-          </a:p>
-          <a:p>
-            <a:pPr algn="ctr">
-              <a:buNone/>
-              <a:defRPr sz="1425" b="1">
-                <a:solidFill>
-                  <a:srgbClr val="1E1E1E"/>
-                </a:solidFill>
-              </a:defRPr>
-            </a:pPr>
-            <a:r>
-              <a:rPr sz="1425" b="1">
-                <a:solidFill>
-                  <a:srgbClr val="1E1E1E"/>
-                </a:solidFill>
-              </a:rPr>
-              <a:t>Read Replica</a:t>
-            </a:r>
-          </a:p>
-        </p:txBody>
-      </p:sp>
-      <p:sp>
-        <p:nvSpPr>
-          <p:cNvPr id="201" name="Прямоугольник: скругленные углы 200">
-            <a:extLst>
-              <a:ext uri="{FF2B5EF4-FFF2-40B4-BE49-F238E27FC236}">
-                <a16:creationId xmlns:a16="http://schemas.microsoft.com/office/drawing/2014/main" id="{C99C2A47-750A-4E78-B2AE-4883F8FAC243}"/>
-              </a:ext>
-            </a:extLst>
-          </p:cNvPr>
-          <p:cNvSpPr>
-            <a:spLocks noGrp="1"/>
-          </p:cNvSpPr>
-          <p:nvPr/>
-        </p:nvSpPr>
-        <p:spPr>
-          <a:xfrm>
-            <a:off x="6238875" y="1476375"/>
-            <a:ext cx="2238375" cy="2190750"/>
-          </a:xfrm>
-          <a:prstGeom prst="roundRect">
-            <a:avLst>
-              <a:gd name="adj" fmla="val 2609"/>
-            </a:avLst>
-          </a:prstGeom>
-          <a:solidFill>
-            <a:srgbClr val="FFEBEE"/>
-          </a:solidFill>
-          <a:ln w="19050">
-            <a:solidFill>
-              <a:srgbClr val="ED1C24"/>
-            </a:solidFill>
-            <a:prstDash val="solid"/>
-          </a:ln>
-        </p:spPr>
-        <p:txBody>
-          <a:bodyPr anchor="ctr"/>
-          <a:lstStyle/>
-          <a:p>
-            <a:pPr algn="ctr">
-              <a:buNone/>
-              <a:defRPr sz="1350" b="1">
-                <a:solidFill>
-                  <a:srgbClr val="1E1E1E"/>
-                </a:solidFill>
-              </a:defRPr>
-            </a:pPr>
-            <a:r>
-              <a:rPr sz="1350" b="1">
-                <a:solidFill>
-                  <a:srgbClr val="1E1E1E"/>
-                </a:solidFill>
-              </a:rPr>
-              <a:t>Redis</a:t>
-            </a:r>
-          </a:p>
-          <a:p>
-            <a:endParaRPr sz="1350" b="1">
-              <a:solidFill>
-                <a:srgbClr val="1E1E1E"/>
-              </a:solidFill>
-            </a:endParaRPr>
-          </a:p>
-          <a:p>
-            <a:pPr algn="ctr">
-              <a:buNone/>
-              <a:defRPr sz="1350" b="1">
-                <a:solidFill>
-                  <a:srgbClr val="1E1E1E"/>
-                </a:solidFill>
-              </a:defRPr>
-            </a:pPr>
-            <a:r>
-              <a:rPr sz="1350" b="1">
-                <a:solidFill>
-                  <a:srgbClr val="1E1E1E"/>
-                </a:solidFill>
-              </a:rPr>
-              <a:t>Cache-Aside для каталога</a:t>
-            </a:r>
-          </a:p>
-          <a:p>
-            <a:endParaRPr sz="1350" b="1">
-              <a:solidFill>
-                <a:srgbClr val="1E1E1E"/>
-              </a:solidFill>
-            </a:endParaRPr>
-          </a:p>
-          <a:p>
-            <a:pPr algn="ctr">
-              <a:buNone/>
-              <a:defRPr sz="1350" b="1">
-                <a:solidFill>
-                  <a:srgbClr val="1E1E1E"/>
-                </a:solidFill>
-              </a:defRPr>
-            </a:pPr>
-            <a:r>
-              <a:rPr sz="1350" b="1">
-                <a:solidFill>
-                  <a:srgbClr val="1E1E1E"/>
-                </a:solidFill>
-              </a:rPr>
-              <a:t>Distributed Lock</a:t>
-            </a:r>
-          </a:p>
-          <a:p>
-            <a:pPr algn="ctr">
-              <a:buNone/>
-              <a:defRPr sz="1350" b="1">
-                <a:solidFill>
-                  <a:srgbClr val="1E1E1E"/>
-                </a:solidFill>
-              </a:defRPr>
-            </a:pPr>
-            <a:r>
-              <a:rPr sz="1350" b="1">
-                <a:solidFill>
-                  <a:srgbClr val="1E1E1E"/>
-                </a:solidFill>
-              </a:rPr>
-              <a:t>при заполнении кэша</a:t>
-            </a:r>
-          </a:p>
-        </p:txBody>
-      </p:sp>
-      <p:sp>
-        <p:nvSpPr>
-          <p:cNvPr id="202" name="Прямоугольник 201">
-            <a:extLst>
-              <a:ext uri="{FF2B5EF4-FFF2-40B4-BE49-F238E27FC236}">
-                <a16:creationId xmlns:a16="http://schemas.microsoft.com/office/drawing/2014/main" id="{DFDB124F-2568-4E25-992D-A1322D012C9E}"/>
-              </a:ext>
-            </a:extLst>
-          </p:cNvPr>
-          <p:cNvSpPr>
-            <a:spLocks noGrp="1"/>
-          </p:cNvSpPr>
-          <p:nvPr/>
-        </p:nvSpPr>
-        <p:spPr>
-          <a:xfrm>
-            <a:off x="1952625" y="4000500"/>
-            <a:ext cx="5238750" cy="323850"/>
-          </a:xfrm>
-          <a:prstGeom prst="rect">
-            <a:avLst/>
-          </a:prstGeom>
-          <a:noFill/>
-          <a:ln w="0">
-            <a:noFill/>
-            <a:prstDash val="solid"/>
-          </a:ln>
-        </p:spPr>
-        <p:txBody>
-          <a:bodyPr anchor="ctr"/>
-          <a:lstStyle/>
-          <a:p>
-            <a:pPr algn="ctr">
-              <a:buNone/>
-              <a:defRPr sz="1350" b="1">
-                <a:solidFill>
-                  <a:srgbClr val="1E1E1E"/>
-                </a:solidFill>
-              </a:defRPr>
-            </a:pPr>
-            <a:r>
-              <a:rPr sz="1350" b="1">
-                <a:solidFill>
-                  <a:srgbClr val="1E1E1E"/>
-                </a:solidFill>
-              </a:rPr>
-              <a:t>Сервисы не обращаются напрямую к чужим базам данных</a:t>
-            </a:r>
-          </a:p>
-        </p:txBody>
-      </p:sp>
-    </p:spTree>
-    <p:extLst>
-      <p:ext uri="{BB962C8B-B14F-4D97-AF65-F5344CB8AC3E}">
-        <p14:creationId xmlns:p14="http://schemas.microsoft.com/office/powerpoint/2010/main" val="1696326950"/>
-      </p:ext>
-    </p:extLst>
-  </p:cSld>
-  <p:clrMapOvr>
-    <a:masterClrMapping/>
-  </p:clrMapOvr>
-</p:sld>
-</file>
-
-<file path=ppt/slides/slide16.xml><?xml version="1.0" encoding="utf-8"?>
 <p:sld xmlns:a="http://schemas.openxmlformats.org/drawingml/2006/main" xmlns:r="http://schemas.openxmlformats.org/officeDocument/2006/relationships" xmlns:p="http://schemas.openxmlformats.org/presentationml/2006/main">
   <p:cSld>
     <p:spTree>
@@ -21161,7 +20508,7 @@
 </p:sld>
 </file>
 
-<file path=ppt/slides/slide17.xml><?xml version="1.0" encoding="utf-8"?>
+<file path=ppt/slides/slide16.xml><?xml version="1.0" encoding="utf-8"?>
 <p:sld xmlns:a="http://schemas.openxmlformats.org/drawingml/2006/main" xmlns:r="http://schemas.openxmlformats.org/officeDocument/2006/relationships" xmlns:p="http://schemas.openxmlformats.org/presentationml/2006/main">
   <p:cSld>
     <p:spTree>
@@ -21666,7 +21013,7 @@
 </p:sld>
 </file>
 
-<file path=ppt/slides/slide18.xml><?xml version="1.0" encoding="utf-8"?>
+<file path=ppt/slides/slide17.xml><?xml version="1.0" encoding="utf-8"?>
 <p:sld xmlns:a="http://schemas.openxmlformats.org/drawingml/2006/main" xmlns:r="http://schemas.openxmlformats.org/officeDocument/2006/relationships" xmlns:p="http://schemas.openxmlformats.org/presentationml/2006/main">
   <p:cSld>
     <p:spTree>
@@ -21749,7 +21096,7 @@
         </p:nvSpPr>
         <p:spPr>
           <a:xfrm>
-            <a:off x="619125" y="1190625"/>
+            <a:off x="500539" y="978408"/>
             <a:ext cx="7858125" cy="609600"/>
           </a:xfrm>
           <a:prstGeom prst="rect">
@@ -21773,12 +21120,100 @@
               </a:defRPr>
             </a:pPr>
             <a:r>
-              <a:rPr sz="1950" b="1">
+              <a:rPr dirty="0" err="1">
                 <a:solidFill>
                   <a:srgbClr val="1E1E1E"/>
                 </a:solidFill>
               </a:rPr>
-              <a:t>Цель достигнута: реализована работоспособная backend-платформа интернет-магазина.</a:t>
+              <a:t>Цель</a:t>
+            </a:r>
+            <a:r>
+              <a:rPr dirty="0">
+                <a:solidFill>
+                  <a:srgbClr val="1E1E1E"/>
+                </a:solidFill>
+              </a:rPr>
+              <a:t> </a:t>
+            </a:r>
+            <a:r>
+              <a:rPr dirty="0" err="1">
+                <a:solidFill>
+                  <a:srgbClr val="1E1E1E"/>
+                </a:solidFill>
+              </a:rPr>
+              <a:t>достигнута</a:t>
+            </a:r>
+            <a:r>
+              <a:rPr dirty="0">
+                <a:solidFill>
+                  <a:srgbClr val="1E1E1E"/>
+                </a:solidFill>
+              </a:rPr>
+              <a:t>: </a:t>
+            </a:r>
+            <a:r>
+              <a:rPr dirty="0" err="1">
+                <a:solidFill>
+                  <a:srgbClr val="1E1E1E"/>
+                </a:solidFill>
+              </a:rPr>
+              <a:t>реализована</a:t>
+            </a:r>
+            <a:r>
+              <a:rPr dirty="0">
+                <a:solidFill>
+                  <a:srgbClr val="1E1E1E"/>
+                </a:solidFill>
+              </a:rPr>
+              <a:t> </a:t>
+            </a:r>
+            <a:r>
+              <a:rPr dirty="0" err="1">
+                <a:solidFill>
+                  <a:srgbClr val="1E1E1E"/>
+                </a:solidFill>
+              </a:rPr>
+              <a:t>работоспособная</a:t>
+            </a:r>
+            <a:r>
+              <a:rPr dirty="0">
+                <a:solidFill>
+                  <a:srgbClr val="1E1E1E"/>
+                </a:solidFill>
+              </a:rPr>
+              <a:t> backend-</a:t>
+            </a:r>
+            <a:r>
+              <a:rPr dirty="0" err="1">
+                <a:solidFill>
+                  <a:srgbClr val="1E1E1E"/>
+                </a:solidFill>
+              </a:rPr>
+              <a:t>платформа</a:t>
+            </a:r>
+            <a:r>
+              <a:rPr dirty="0">
+                <a:solidFill>
+                  <a:srgbClr val="1E1E1E"/>
+                </a:solidFill>
+              </a:rPr>
+              <a:t> </a:t>
+            </a:r>
+            <a:r>
+              <a:rPr dirty="0" err="1">
+                <a:solidFill>
+                  <a:srgbClr val="1E1E1E"/>
+                </a:solidFill>
+              </a:rPr>
+              <a:t>интернет-магазина</a:t>
+            </a:r>
+            <a:r>
+              <a:rPr dirty="0">
+                <a:solidFill>
+                  <a:srgbClr val="1E1E1E"/>
+                </a:solidFill>
+              </a:rPr>
+              <a:t>.</a:t>
             </a:r>
           </a:p>
         </p:txBody>
@@ -22212,7 +21647,7 @@
 </p:sld>
 </file>
 
-<file path=ppt/slides/slide19.xml><?xml version="1.0" encoding="utf-8"?>
+<file path=ppt/slides/slide18.xml><?xml version="1.0" encoding="utf-8"?>
 <p:sld xmlns:a="http://schemas.openxmlformats.org/drawingml/2006/main" xmlns:r="http://schemas.openxmlformats.org/officeDocument/2006/relationships" xmlns:p="http://schemas.openxmlformats.org/presentationml/2006/main">
   <p:cSld>
     <p:spTree>
@@ -22281,56 +21716,6 @@
       </p:sp>
       <p:sp>
         <p:nvSpPr>
-          <p:cNvPr id="2" name="plans-lead">
-            <a:extLst>
-              <a:ext uri="{FF2B5EF4-FFF2-40B4-BE49-F238E27FC236}">
-                <a16:creationId xmlns:a16="http://schemas.microsoft.com/office/drawing/2014/main" id="{5B399ACD-86FD-48A6-B035-116F3E0721C0}"/>
-              </a:ext>
-            </a:extLst>
-          </p:cNvPr>
-          <p:cNvSpPr>
-            <a:spLocks noGrp="1"/>
-          </p:cNvSpPr>
-          <p:nvPr/>
-        </p:nvSpPr>
-        <p:spPr>
-          <a:xfrm>
-            <a:off x="619125" y="1190625"/>
-            <a:ext cx="7858125" cy="438150"/>
-          </a:xfrm>
-          <a:prstGeom prst="rect">
-            <a:avLst/>
-          </a:prstGeom>
-          <a:noFill/>
-          <a:ln w="0">
-            <a:noFill/>
-            <a:prstDash val="solid"/>
-          </a:ln>
-        </p:spPr>
-        <p:txBody>
-          <a:bodyPr/>
-          <a:lstStyle/>
-          <a:p>
-            <a:pPr algn="l">
-              <a:defRPr sz="1950" b="1">
-                <a:solidFill>
-                  <a:srgbClr val="1E1E1E"/>
-                </a:solidFill>
-              </a:defRPr>
-            </a:pPr>
-            <a:r>
-              <a:rPr sz="1950" b="1">
-                <a:solidFill>
-                  <a:srgbClr val="1E1E1E"/>
-                </a:solidFill>
-              </a:rPr>
-              <a:t>Следующие шаги развития проекта</a:t>
-            </a:r>
-          </a:p>
-        </p:txBody>
-      </p:sp>
-      <p:sp>
-        <p:nvSpPr>
           <p:cNvPr id="3" name="plan-number-1">
             <a:extLst>
               <a:ext uri="{FF2B5EF4-FFF2-40B4-BE49-F238E27FC236}">
@@ -22345,7 +21730,7 @@
         </p:nvSpPr>
         <p:spPr>
           <a:xfrm>
-            <a:off x="762000" y="1952625"/>
+            <a:off x="569118" y="1481137"/>
             <a:ext cx="438150" cy="438150"/>
           </a:xfrm>
           <a:prstGeom prst="ellipse">
@@ -22399,7 +21784,7 @@
         </p:nvSpPr>
         <p:spPr>
           <a:xfrm>
-            <a:off x="1476375" y="1933575"/>
+            <a:off x="1283493" y="1462087"/>
             <a:ext cx="6715125" cy="523875"/>
           </a:xfrm>
           <a:prstGeom prst="rect">
@@ -22449,7 +21834,7 @@
         </p:nvSpPr>
         <p:spPr>
           <a:xfrm>
-            <a:off x="1476375" y="2581275"/>
+            <a:off x="1283493" y="2109787"/>
             <a:ext cx="6715125" cy="19050"/>
           </a:xfrm>
           <a:prstGeom prst="rect">
@@ -22489,7 +21874,7 @@
         </p:nvSpPr>
         <p:spPr>
           <a:xfrm>
-            <a:off x="762000" y="2828925"/>
+            <a:off x="569118" y="2357437"/>
             <a:ext cx="438150" cy="438150"/>
           </a:xfrm>
           <a:prstGeom prst="ellipse">
@@ -22543,7 +21928,7 @@
         </p:nvSpPr>
         <p:spPr>
           <a:xfrm>
-            <a:off x="1476375" y="2809875"/>
+            <a:off x="1283493" y="2338387"/>
             <a:ext cx="6715125" cy="523875"/>
           </a:xfrm>
           <a:prstGeom prst="rect">
@@ -22593,7 +21978,7 @@
         </p:nvSpPr>
         <p:spPr>
           <a:xfrm>
-            <a:off x="1476375" y="3457575"/>
+            <a:off x="1283493" y="2986087"/>
             <a:ext cx="6715125" cy="19050"/>
           </a:xfrm>
           <a:prstGeom prst="rect">
@@ -22633,7 +22018,7 @@
         </p:nvSpPr>
         <p:spPr>
           <a:xfrm>
-            <a:off x="762000" y="3705225"/>
+            <a:off x="569118" y="3233737"/>
             <a:ext cx="438150" cy="438150"/>
           </a:xfrm>
           <a:prstGeom prst="ellipse">
@@ -22687,7 +22072,7 @@
         </p:nvSpPr>
         <p:spPr>
           <a:xfrm>
-            <a:off x="1476375" y="3686175"/>
+            <a:off x="1283493" y="3214687"/>
             <a:ext cx="6715125" cy="523875"/>
           </a:xfrm>
           <a:prstGeom prst="rect">
@@ -22725,6 +22110,113 @@
     <p:extLst>
       <p:ext uri="{BB962C8B-B14F-4D97-AF65-F5344CB8AC3E}">
         <p14:creationId xmlns:p14="http://schemas.microsoft.com/office/powerpoint/2010/main" val="351381750"/>
+      </p:ext>
+    </p:extLst>
+  </p:cSld>
+  <p:clrMapOvr>
+    <a:masterClrMapping/>
+  </p:clrMapOvr>
+</p:sld>
+</file>
+
+<file path=ppt/slides/slide19.xml><?xml version="1.0" encoding="utf-8"?>
+<p:sld xmlns:a="http://schemas.openxmlformats.org/drawingml/2006/main" xmlns:r="http://schemas.openxmlformats.org/officeDocument/2006/relationships" xmlns:p="http://schemas.openxmlformats.org/presentationml/2006/main">
+  <p:cSld>
+    <p:spTree>
+      <p:nvGrpSpPr>
+        <p:cNvPr id="1" name=""/>
+        <p:cNvGrpSpPr/>
+        <p:nvPr/>
+      </p:nvGrpSpPr>
+      <p:grpSpPr>
+        <a:xfrm>
+          <a:off x="0" y="0"/>
+          <a:ext cx="0" cy="0"/>
+          <a:chOff x="0" y="0"/>
+          <a:chExt cx="0" cy="0"/>
+        </a:xfrm>
+      </p:grpSpPr>
+      <p:sp>
+        <p:nvSpPr>
+          <p:cNvPr id="221" name="Google Shape;221;p11">
+            <a:extLst>
+              <a:ext uri="{FF2B5EF4-FFF2-40B4-BE49-F238E27FC236}">
+                <a16:creationId xmlns:a16="http://schemas.microsoft.com/office/drawing/2014/main" id="{C1E6A4F1-8F5F-42FA-B822-4EF130C01C39}"/>
+              </a:ext>
+            </a:extLst>
+          </p:cNvPr>
+          <p:cNvSpPr>
+            <a:spLocks noGrp="1"/>
+          </p:cNvSpPr>
+          <p:nvPr>
+            <p:ph type="title"/>
+          </p:nvPr>
+        </p:nvSpPr>
+        <p:spPr>
+          <a:xfrm>
+            <a:off x="956225" y="396394"/>
+            <a:ext cx="7559100" cy="4090800"/>
+          </a:xfrm>
+          <a:prstGeom prst="rect">
+            <a:avLst/>
+          </a:prstGeom>
+          <a:noFill/>
+          <a:ln>
+            <a:noFill/>
+          </a:ln>
+        </p:spPr>
+        <p:txBody>
+          <a:bodyPr spcFirstLastPara="1" wrap="square" lIns="91425" tIns="91425" rIns="91425" bIns="91425" anchor="ctr">
+            <a:noAutofit/>
+          </a:bodyPr>
+          <a:lstStyle/>
+          <a:p>
+            <a:pPr marL="0" lvl="0" indent="0" algn="l">
+              <a:lnSpc>
+                <a:spcPct val="100000"/>
+              </a:lnSpc>
+              <a:spcBef>
+                <a:spcPts val="0"/>
+              </a:spcBef>
+              <a:spcAft>
+                <a:spcPts val="0"/>
+              </a:spcAft>
+              <a:buClr>
+                <a:schemeClr val="dk1"/>
+              </a:buClr>
+              <a:buSzPts val="1100"/>
+              <a:buFont typeface="Arial"/>
+              <a:buNone/>
+            </a:pPr>
+            <a:r>
+              <a:rPr sz="4900"/>
+              <a:t>Спасибо за внимание!</a:t>
+            </a:r>
+            <a:br/>
+            <a:endParaRPr/>
+          </a:p>
+          <a:p>
+            <a:pPr marL="0" lvl="0" indent="0" algn="l">
+              <a:lnSpc>
+                <a:spcPct val="100000"/>
+              </a:lnSpc>
+              <a:spcBef>
+                <a:spcPts val="0"/>
+              </a:spcBef>
+              <a:spcAft>
+                <a:spcPts val="0"/>
+              </a:spcAft>
+              <a:buSzPts val="4600"/>
+              <a:buNone/>
+            </a:pPr>
+            <a:endParaRPr/>
+          </a:p>
+        </p:txBody>
+      </p:sp>
+    </p:spTree>
+    <p:extLst>
+      <p:ext uri="{BB962C8B-B14F-4D97-AF65-F5344CB8AC3E}">
+        <p14:creationId xmlns:p14="http://schemas.microsoft.com/office/powerpoint/2010/main" val="764604972"/>
       </p:ext>
     </p:extLst>
   </p:cSld>
@@ -22898,113 +22390,6 @@
 </p:sld>
 </file>
 
-<file path=ppt/slides/slide20.xml><?xml version="1.0" encoding="utf-8"?>
-<p:sld xmlns:a="http://schemas.openxmlformats.org/drawingml/2006/main" xmlns:r="http://schemas.openxmlformats.org/officeDocument/2006/relationships" xmlns:p="http://schemas.openxmlformats.org/presentationml/2006/main">
-  <p:cSld>
-    <p:spTree>
-      <p:nvGrpSpPr>
-        <p:cNvPr id="1" name=""/>
-        <p:cNvGrpSpPr/>
-        <p:nvPr/>
-      </p:nvGrpSpPr>
-      <p:grpSpPr>
-        <a:xfrm>
-          <a:off x="0" y="0"/>
-          <a:ext cx="0" cy="0"/>
-          <a:chOff x="0" y="0"/>
-          <a:chExt cx="0" cy="0"/>
-        </a:xfrm>
-      </p:grpSpPr>
-      <p:sp>
-        <p:nvSpPr>
-          <p:cNvPr id="221" name="Google Shape;221;p11">
-            <a:extLst>
-              <a:ext uri="{FF2B5EF4-FFF2-40B4-BE49-F238E27FC236}">
-                <a16:creationId xmlns:a16="http://schemas.microsoft.com/office/drawing/2014/main" id="{C1E6A4F1-8F5F-42FA-B822-4EF130C01C39}"/>
-              </a:ext>
-            </a:extLst>
-          </p:cNvPr>
-          <p:cNvSpPr>
-            <a:spLocks noGrp="1"/>
-          </p:cNvSpPr>
-          <p:nvPr>
-            <p:ph type="title"/>
-          </p:nvPr>
-        </p:nvSpPr>
-        <p:spPr>
-          <a:xfrm>
-            <a:off x="956225" y="396394"/>
-            <a:ext cx="7559100" cy="4090800"/>
-          </a:xfrm>
-          <a:prstGeom prst="rect">
-            <a:avLst/>
-          </a:prstGeom>
-          <a:noFill/>
-          <a:ln>
-            <a:noFill/>
-          </a:ln>
-        </p:spPr>
-        <p:txBody>
-          <a:bodyPr spcFirstLastPara="1" wrap="square" lIns="91425" tIns="91425" rIns="91425" bIns="91425" anchor="ctr">
-            <a:noAutofit/>
-          </a:bodyPr>
-          <a:lstStyle/>
-          <a:p>
-            <a:pPr marL="0" lvl="0" indent="0" algn="l">
-              <a:lnSpc>
-                <a:spcPct val="100000"/>
-              </a:lnSpc>
-              <a:spcBef>
-                <a:spcPts val="0"/>
-              </a:spcBef>
-              <a:spcAft>
-                <a:spcPts val="0"/>
-              </a:spcAft>
-              <a:buClr>
-                <a:schemeClr val="dk1"/>
-              </a:buClr>
-              <a:buSzPts val="1100"/>
-              <a:buFont typeface="Arial"/>
-              <a:buNone/>
-            </a:pPr>
-            <a:r>
-              <a:rPr sz="4900"/>
-              <a:t>Спасибо за внимание!</a:t>
-            </a:r>
-            <a:br/>
-            <a:endParaRPr/>
-          </a:p>
-          <a:p>
-            <a:pPr marL="0" lvl="0" indent="0" algn="l">
-              <a:lnSpc>
-                <a:spcPct val="100000"/>
-              </a:lnSpc>
-              <a:spcBef>
-                <a:spcPts val="0"/>
-              </a:spcBef>
-              <a:spcAft>
-                <a:spcPts val="0"/>
-              </a:spcAft>
-              <a:buSzPts val="4600"/>
-              <a:buNone/>
-            </a:pPr>
-            <a:endParaRPr/>
-          </a:p>
-        </p:txBody>
-      </p:sp>
-    </p:spTree>
-    <p:extLst>
-      <p:ext uri="{BB962C8B-B14F-4D97-AF65-F5344CB8AC3E}">
-        <p14:creationId xmlns:p14="http://schemas.microsoft.com/office/powerpoint/2010/main" val="764604972"/>
-      </p:ext>
-    </p:extLst>
-  </p:cSld>
-  <p:clrMapOvr>
-    <a:masterClrMapping/>
-  </p:clrMapOvr>
-</p:sld>
-</file>
-
 <file path=ppt/slides/slide3.xml><?xml version="1.0" encoding="utf-8"?>
 <p:sld xmlns:a="http://schemas.openxmlformats.org/drawingml/2006/main" xmlns:r="http://schemas.openxmlformats.org/officeDocument/2006/relationships" xmlns:p="http://schemas.openxmlformats.org/presentationml/2006/main">
   <p:cSld>
@@ -23342,7 +22727,7 @@
               <a:buNone/>
             </a:pPr>
             <a:r>
-              <a:rPr sz="1400" b="0" i="0" u="none" cap="none">
+              <a:rPr sz="1400" b="0" i="0" u="none" cap="none" dirty="0">
                 <a:solidFill>
                   <a:srgbClr val="000000"/>
                 </a:solidFill>
@@ -23350,29 +22735,10 @@
                 <a:ea typeface="Roboto"/>
                 <a:cs typeface="Roboto"/>
               </a:rPr>
-              <a:t>C#/.NET разработчик</a:t>
+              <a:t>C#/.NET </a:t>
             </a:r>
-          </a:p>
-          <a:p>
-            <a:pPr marL="0" marR="0" lvl="0" indent="0" algn="l">
-              <a:lnSpc>
-                <a:spcPct val="100000"/>
-              </a:lnSpc>
-              <a:spcBef>
-                <a:spcPts val="0"/>
-              </a:spcBef>
-              <a:spcAft>
-                <a:spcPts val="0"/>
-              </a:spcAft>
-              <a:buClr>
-                <a:srgbClr val="000000"/>
-              </a:buClr>
-              <a:buSzPts val="1400"/>
-              <a:buFont typeface="Arial"/>
-              <a:buNone/>
-            </a:pPr>
             <a:r>
-              <a:rPr sz="1400" b="0" i="0" u="none" cap="none">
+              <a:rPr sz="1400" b="0" i="0" u="none" cap="none" dirty="0" err="1">
                 <a:solidFill>
                   <a:srgbClr val="000000"/>
                 </a:solidFill>
@@ -23380,8 +22746,76 @@
                 <a:ea typeface="Roboto"/>
                 <a:cs typeface="Roboto"/>
               </a:rPr>
-              <a:t>Компания: —</a:t>
+              <a:t>разработчик</a:t>
             </a:r>
+            <a:endParaRPr sz="1400" b="0" i="0" u="none" cap="none" dirty="0">
+              <a:solidFill>
+                <a:srgbClr val="000000"/>
+              </a:solidFill>
+              <a:latin typeface="Roboto"/>
+              <a:ea typeface="Roboto"/>
+              <a:cs typeface="Roboto"/>
+            </a:endParaRPr>
+          </a:p>
+          <a:p>
+            <a:pPr marL="0" marR="0" lvl="0" indent="0" algn="l">
+              <a:lnSpc>
+                <a:spcPct val="100000"/>
+              </a:lnSpc>
+              <a:spcBef>
+                <a:spcPts val="0"/>
+              </a:spcBef>
+              <a:spcAft>
+                <a:spcPts val="0"/>
+              </a:spcAft>
+              <a:buClr>
+                <a:srgbClr val="000000"/>
+              </a:buClr>
+              <a:buSzPts val="1400"/>
+              <a:buFont typeface="Arial"/>
+              <a:buNone/>
+            </a:pPr>
+            <a:r>
+              <a:rPr sz="1400" b="0" i="0" u="none" cap="none" dirty="0" err="1">
+                <a:solidFill>
+                  <a:srgbClr val="000000"/>
+                </a:solidFill>
+                <a:latin typeface="Roboto"/>
+                <a:ea typeface="Roboto"/>
+                <a:cs typeface="Roboto"/>
+              </a:rPr>
+              <a:t>Компания</a:t>
+            </a:r>
+            <a:r>
+              <a:rPr sz="1400" b="0" i="0" u="none" cap="none" dirty="0">
+                <a:solidFill>
+                  <a:srgbClr val="000000"/>
+                </a:solidFill>
+                <a:latin typeface="Roboto"/>
+                <a:ea typeface="Roboto"/>
+                <a:cs typeface="Roboto"/>
+              </a:rPr>
+              <a:t>: </a:t>
+            </a:r>
+            <a:r>
+              <a:rPr lang="ru-RU" sz="1400" b="0" i="0" u="none" cap="none" dirty="0" err="1">
+                <a:solidFill>
+                  <a:srgbClr val="000000"/>
+                </a:solidFill>
+                <a:latin typeface="Roboto"/>
+                <a:ea typeface="Roboto"/>
+                <a:cs typeface="Roboto"/>
+              </a:rPr>
+              <a:t>Альфа-банк</a:t>
+            </a:r>
+            <a:endParaRPr sz="1400" b="0" i="0" u="none" cap="none" dirty="0">
+              <a:solidFill>
+                <a:srgbClr val="000000"/>
+              </a:solidFill>
+              <a:latin typeface="Roboto"/>
+              <a:ea typeface="Roboto"/>
+              <a:cs typeface="Roboto"/>
+            </a:endParaRPr>
           </a:p>
         </p:txBody>
       </p:sp>
@@ -23506,8 +22940,8 @@
         </p:nvSpPr>
         <p:spPr>
           <a:xfrm>
-            <a:off x="786525" y="1510325"/>
-            <a:ext cx="3782700" cy="376200"/>
+            <a:off x="786525" y="1357313"/>
+            <a:ext cx="3782700" cy="529212"/>
           </a:xfrm>
           <a:prstGeom prst="roundRect">
             <a:avLst>
@@ -23545,7 +22979,7 @@
               <a:buNone/>
             </a:pPr>
             <a:r>
-              <a:rPr>
+              <a:rPr dirty="0" err="1">
                 <a:solidFill>
                   <a:schemeClr val="dk1"/>
                 </a:solidFill>
@@ -23553,8 +22987,60 @@
                 <a:ea typeface="Roboto"/>
                 <a:cs typeface="Roboto"/>
               </a:rPr>
-              <a:t>Описание проекта и сценарии</a:t>
+              <a:t>Описание</a:t>
             </a:r>
+            <a:r>
+              <a:rPr dirty="0">
+                <a:solidFill>
+                  <a:schemeClr val="dk1"/>
+                </a:solidFill>
+                <a:latin typeface="Roboto"/>
+                <a:ea typeface="Roboto"/>
+                <a:cs typeface="Roboto"/>
+              </a:rPr>
+              <a:t> </a:t>
+            </a:r>
+            <a:r>
+              <a:rPr dirty="0" err="1">
+                <a:solidFill>
+                  <a:schemeClr val="dk1"/>
+                </a:solidFill>
+                <a:latin typeface="Roboto"/>
+                <a:ea typeface="Roboto"/>
+                <a:cs typeface="Roboto"/>
+              </a:rPr>
+              <a:t>проекта</a:t>
+            </a:r>
+            <a:r>
+              <a:rPr dirty="0">
+                <a:solidFill>
+                  <a:schemeClr val="dk1"/>
+                </a:solidFill>
+                <a:latin typeface="Roboto"/>
+                <a:ea typeface="Roboto"/>
+                <a:cs typeface="Roboto"/>
+              </a:rPr>
+              <a:t> и </a:t>
+            </a:r>
+            <a:r>
+              <a:rPr dirty="0" err="1">
+                <a:solidFill>
+                  <a:schemeClr val="dk1"/>
+                </a:solidFill>
+                <a:latin typeface="Roboto"/>
+                <a:ea typeface="Roboto"/>
+                <a:cs typeface="Roboto"/>
+              </a:rPr>
+              <a:t>сценарии</a:t>
+            </a:r>
+            <a:endParaRPr dirty="0">
+              <a:solidFill>
+                <a:schemeClr val="dk1"/>
+              </a:solidFill>
+              <a:latin typeface="Roboto"/>
+              <a:ea typeface="Roboto"/>
+              <a:cs typeface="Roboto"/>
+            </a:endParaRPr>
           </a:p>
         </p:txBody>
       </p:sp>
@@ -23574,8 +23060,8 @@
         </p:nvSpPr>
         <p:spPr>
           <a:xfrm>
-            <a:off x="787125" y="2099825"/>
-            <a:ext cx="3782700" cy="376200"/>
+            <a:off x="786525" y="2021904"/>
+            <a:ext cx="3782700" cy="611319"/>
           </a:xfrm>
           <a:prstGeom prst="roundRect">
             <a:avLst>
@@ -23610,7 +23096,7 @@
               <a:buNone/>
             </a:pPr>
             <a:r>
-              <a:rPr>
+              <a:rPr dirty="0" err="1">
                 <a:solidFill>
                   <a:schemeClr val="dk1"/>
                 </a:solidFill>
@@ -23618,8 +23104,60 @@
                 <a:ea typeface="Roboto"/>
                 <a:cs typeface="Roboto"/>
               </a:rPr>
-              <a:t>Используемые технологии и паттерны</a:t>
+              <a:t>Используемые</a:t>
             </a:r>
+            <a:r>
+              <a:rPr dirty="0">
+                <a:solidFill>
+                  <a:schemeClr val="dk1"/>
+                </a:solidFill>
+                <a:latin typeface="Roboto"/>
+                <a:ea typeface="Roboto"/>
+                <a:cs typeface="Roboto"/>
+              </a:rPr>
+              <a:t> </a:t>
+            </a:r>
+            <a:r>
+              <a:rPr dirty="0" err="1">
+                <a:solidFill>
+                  <a:schemeClr val="dk1"/>
+                </a:solidFill>
+                <a:latin typeface="Roboto"/>
+                <a:ea typeface="Roboto"/>
+                <a:cs typeface="Roboto"/>
+              </a:rPr>
+              <a:t>технологии</a:t>
+            </a:r>
+            <a:r>
+              <a:rPr dirty="0">
+                <a:solidFill>
+                  <a:schemeClr val="dk1"/>
+                </a:solidFill>
+                <a:latin typeface="Roboto"/>
+                <a:ea typeface="Roboto"/>
+                <a:cs typeface="Roboto"/>
+              </a:rPr>
+              <a:t> и </a:t>
+            </a:r>
+            <a:r>
+              <a:rPr dirty="0" err="1">
+                <a:solidFill>
+                  <a:schemeClr val="dk1"/>
+                </a:solidFill>
+                <a:latin typeface="Roboto"/>
+                <a:ea typeface="Roboto"/>
+                <a:cs typeface="Roboto"/>
+              </a:rPr>
+              <a:t>паттерны</a:t>
+            </a:r>
+            <a:endParaRPr dirty="0">
+              <a:solidFill>
+                <a:schemeClr val="dk1"/>
+              </a:solidFill>
+              <a:latin typeface="Roboto"/>
+              <a:ea typeface="Roboto"/>
+              <a:cs typeface="Roboto"/>
+            </a:endParaRPr>
           </a:p>
         </p:txBody>
       </p:sp>
@@ -23639,8 +23177,8 @@
         </p:nvSpPr>
         <p:spPr>
           <a:xfrm>
-            <a:off x="787125" y="2683025"/>
-            <a:ext cx="3782700" cy="376200"/>
+            <a:off x="786525" y="2747494"/>
+            <a:ext cx="3782700" cy="584256"/>
           </a:xfrm>
           <a:prstGeom prst="roundRect">
             <a:avLst>
@@ -23675,7 +23213,7 @@
               <a:buNone/>
             </a:pPr>
             <a:r>
-              <a:rPr>
+              <a:rPr dirty="0" err="1">
                 <a:solidFill>
                   <a:schemeClr val="dk1"/>
                 </a:solidFill>
@@ -23683,8 +23221,60 @@
                 <a:ea typeface="Roboto"/>
                 <a:cs typeface="Roboto"/>
               </a:rPr>
-              <a:t>Архитектура и взаимодействие сервисов</a:t>
+              <a:t>Архитектура</a:t>
             </a:r>
+            <a:r>
+              <a:rPr dirty="0">
+                <a:solidFill>
+                  <a:schemeClr val="dk1"/>
+                </a:solidFill>
+                <a:latin typeface="Roboto"/>
+                <a:ea typeface="Roboto"/>
+                <a:cs typeface="Roboto"/>
+              </a:rPr>
+              <a:t> и </a:t>
+            </a:r>
+            <a:r>
+              <a:rPr dirty="0" err="1">
+                <a:solidFill>
+                  <a:schemeClr val="dk1"/>
+                </a:solidFill>
+                <a:latin typeface="Roboto"/>
+                <a:ea typeface="Roboto"/>
+                <a:cs typeface="Roboto"/>
+              </a:rPr>
+              <a:t>взаимодействие</a:t>
+            </a:r>
+            <a:r>
+              <a:rPr dirty="0">
+                <a:solidFill>
+                  <a:schemeClr val="dk1"/>
+                </a:solidFill>
+                <a:latin typeface="Roboto"/>
+                <a:ea typeface="Roboto"/>
+                <a:cs typeface="Roboto"/>
+              </a:rPr>
+              <a:t> </a:t>
+            </a:r>
+            <a:r>
+              <a:rPr dirty="0" err="1">
+                <a:solidFill>
+                  <a:schemeClr val="dk1"/>
+                </a:solidFill>
+                <a:latin typeface="Roboto"/>
+                <a:ea typeface="Roboto"/>
+                <a:cs typeface="Roboto"/>
+              </a:rPr>
+              <a:t>сервисов</a:t>
+            </a:r>
+            <a:endParaRPr dirty="0">
+              <a:solidFill>
+                <a:schemeClr val="dk1"/>
+              </a:solidFill>
+              <a:latin typeface="Roboto"/>
+              <a:ea typeface="Roboto"/>
+              <a:cs typeface="Roboto"/>
+            </a:endParaRPr>
           </a:p>
         </p:txBody>
       </p:sp>
@@ -23704,8 +23294,8 @@
         </p:nvSpPr>
         <p:spPr>
           <a:xfrm>
-            <a:off x="786525" y="3266225"/>
-            <a:ext cx="3782700" cy="376200"/>
+            <a:off x="786525" y="3446021"/>
+            <a:ext cx="3782700" cy="584256"/>
           </a:xfrm>
           <a:prstGeom prst="roundRect">
             <a:avLst>
@@ -23740,7 +23330,7 @@
               <a:buNone/>
             </a:pPr>
             <a:r>
-              <a:rPr>
+              <a:rPr dirty="0" err="1">
                 <a:solidFill>
                   <a:schemeClr val="dk1"/>
                 </a:solidFill>
@@ -23748,8 +23338,82 @@
                 <a:ea typeface="Roboto"/>
                 <a:cs typeface="Roboto"/>
               </a:rPr>
-              <a:t>Результаты, выводы и планы развития</a:t>
+              <a:t>Результаты</a:t>
             </a:r>
+            <a:r>
+              <a:rPr dirty="0">
+                <a:solidFill>
+                  <a:schemeClr val="dk1"/>
+                </a:solidFill>
+                <a:latin typeface="Roboto"/>
+                <a:ea typeface="Roboto"/>
+                <a:cs typeface="Roboto"/>
+              </a:rPr>
+              <a:t>, </a:t>
+            </a:r>
+            <a:r>
+              <a:rPr dirty="0" err="1">
+                <a:solidFill>
+                  <a:schemeClr val="dk1"/>
+                </a:solidFill>
+                <a:latin typeface="Roboto"/>
+                <a:ea typeface="Roboto"/>
+                <a:cs typeface="Roboto"/>
+              </a:rPr>
+              <a:t>выводы</a:t>
+            </a:r>
+            <a:r>
+              <a:rPr dirty="0">
+                <a:solidFill>
+                  <a:schemeClr val="dk1"/>
+                </a:solidFill>
+                <a:latin typeface="Roboto"/>
+                <a:ea typeface="Roboto"/>
+                <a:cs typeface="Roboto"/>
+              </a:rPr>
+              <a:t> и </a:t>
+            </a:r>
+            <a:r>
+              <a:rPr dirty="0" err="1">
+                <a:solidFill>
+                  <a:schemeClr val="dk1"/>
+                </a:solidFill>
+                <a:latin typeface="Roboto"/>
+                <a:ea typeface="Roboto"/>
+                <a:cs typeface="Roboto"/>
+              </a:rPr>
+              <a:t>планы</a:t>
+            </a:r>
+            <a:r>
+              <a:rPr dirty="0">
+                <a:solidFill>
+                  <a:schemeClr val="dk1"/>
+                </a:solidFill>
+                <a:latin typeface="Roboto"/>
+                <a:ea typeface="Roboto"/>
+                <a:cs typeface="Roboto"/>
+              </a:rPr>
+              <a:t> </a:t>
+            </a:r>
+            <a:r>
+              <a:rPr dirty="0" err="1">
+                <a:solidFill>
+                  <a:schemeClr val="dk1"/>
+                </a:solidFill>
+                <a:latin typeface="Roboto"/>
+                <a:ea typeface="Roboto"/>
+                <a:cs typeface="Roboto"/>
+              </a:rPr>
+              <a:t>развития</a:t>
+            </a:r>
+            <a:endParaRPr dirty="0">
+              <a:solidFill>
+                <a:schemeClr val="dk1"/>
+              </a:solidFill>
+              <a:latin typeface="Roboto"/>
+              <a:ea typeface="Roboto"/>
+              <a:cs typeface="Roboto"/>
+            </a:endParaRPr>
           </a:p>
         </p:txBody>
       </p:sp>
@@ -23757,19 +23421,20 @@
         <p:nvCxnSpPr>
           <p:cNvPr id="180" name="Google Shape;156;p4"/>
           <p:cNvCxnSpPr>
+            <a:cxnSpLocks/>
             <a:stCxn id="152" idx="1"/>
             <a:endCxn id="153" idx="1"/>
           </p:cNvCxnSpPr>
           <p:nvPr/>
         </p:nvCxnSpPr>
         <p:spPr>
-          <a:xfrm>
-            <a:off x="786525" y="1698425"/>
-            <a:ext cx="600" cy="589500"/>
+          <a:xfrm rot="10800000" flipV="1">
+            <a:off x="786525" y="1621918"/>
+            <a:ext cx="12700" cy="705645"/>
           </a:xfrm>
           <a:prstGeom prst="curvedConnector3">
             <a:avLst>
-              <a:gd name="adj1" fmla="val -39687500"/>
+              <a:gd name="adj1" fmla="val 1800000"/>
             </a:avLst>
           </a:prstGeom>
           <a:ln w="9525" cap="flat">
@@ -23787,19 +23452,20 @@
         <p:nvCxnSpPr>
           <p:cNvPr id="181" name="Google Shape;157;p4"/>
           <p:cNvCxnSpPr>
+            <a:cxnSpLocks/>
             <a:stCxn id="153" idx="1"/>
             <a:endCxn id="154" idx="1"/>
           </p:cNvCxnSpPr>
           <p:nvPr/>
         </p:nvCxnSpPr>
         <p:spPr>
-          <a:xfrm>
-            <a:off x="787125" y="2287925"/>
-            <a:ext cx="600" cy="583200"/>
+          <a:xfrm rot="10800000" flipV="1">
+            <a:off x="786525" y="2327564"/>
+            <a:ext cx="12700" cy="712058"/>
           </a:xfrm>
           <a:prstGeom prst="curvedConnector3">
             <a:avLst>
-              <a:gd name="adj1" fmla="val -39687500"/>
+              <a:gd name="adj1" fmla="val 1800000"/>
             </a:avLst>
           </a:prstGeom>
           <a:ln w="9525" cap="flat">
@@ -23817,19 +23483,20 @@
         <p:nvCxnSpPr>
           <p:cNvPr id="182" name="Google Shape;158;p4"/>
           <p:cNvCxnSpPr>
+            <a:cxnSpLocks/>
             <a:stCxn id="154" idx="1"/>
             <a:endCxn id="155" idx="1"/>
           </p:cNvCxnSpPr>
           <p:nvPr/>
         </p:nvCxnSpPr>
         <p:spPr>
-          <a:xfrm flipH="1">
-            <a:off x="786525" y="2871125"/>
-            <a:ext cx="600" cy="583200"/>
+          <a:xfrm rot="10800000" flipV="1">
+            <a:off x="786525" y="3039621"/>
+            <a:ext cx="12700" cy="698527"/>
           </a:xfrm>
           <a:prstGeom prst="curvedConnector3">
             <a:avLst>
-              <a:gd name="adj1" fmla="val 39787500"/>
+              <a:gd name="adj1" fmla="val 1800000"/>
             </a:avLst>
           </a:prstGeom>
           <a:ln w="9525" cap="flat">
@@ -24496,7 +24163,7 @@
         </p:nvGraphicFramePr>
         <p:xfrm>
           <a:off x="952500" y="1544194"/>
-          <a:ext cx="3000000" cy="3000000"/>
+          <a:ext cx="7239000" cy="1446492"/>
         </p:xfrm>
         <a:graphic>
           <a:graphicData uri="http://schemas.openxmlformats.org/drawingml/2006/table">
@@ -25422,12 +25089,34 @@
           <a:chExt cx="0" cy="0"/>
         </a:xfrm>
       </p:grpSpPr>
+      <p:pic>
+        <p:nvPicPr>
+          <p:cNvPr id="4" name="Рисунок 3"/>
+          <p:cNvPicPr>
+            <a:picLocks noChangeAspect="1"/>
+          </p:cNvPicPr>
+          <p:nvPr/>
+        </p:nvPicPr>
+        <p:blipFill>
+          <a:blip r:embed="rId3"/>
+          <a:stretch/>
+        </p:blipFill>
+        <p:spPr>
+          <a:xfrm>
+            <a:off x="982325" y="1066800"/>
+            <a:ext cx="7179350" cy="3571875"/>
+          </a:xfrm>
+          <a:prstGeom prst="rect">
+            <a:avLst/>
+          </a:prstGeom>
+        </p:spPr>
+      </p:pic>
       <p:sp>
         <p:nvSpPr>
-          <p:cNvPr id="3" name="slide-title">
+          <p:cNvPr id="3" name="slide-title-top">
             <a:extLst>
               <a:ext uri="{FF2B5EF4-FFF2-40B4-BE49-F238E27FC236}">
-                <a16:creationId xmlns:a16="http://schemas.microsoft.com/office/drawing/2014/main" id="{C3A7F53A-B751-4BF4-A0DA-3366DE0898E7}"/>
+                <a16:creationId xmlns:a16="http://schemas.microsoft.com/office/drawing/2014/main" id="{44BABCB1-AE3B-4BFD-88E2-2C1C6A41954E}"/>
               </a:ext>
             </a:extLst>
           </p:cNvPr>
@@ -25467,37 +25156,15 @@
                   <a:srgbClr val="000000"/>
                 </a:solidFill>
               </a:rPr>
-              <a:t>Оформление заказа: создание заказа</a:t>
+              <a:t>Регистрация пользователя</a:t>
             </a:r>
           </a:p>
         </p:txBody>
       </p:sp>
-      <p:pic>
-        <p:nvPicPr>
-          <p:cNvPr id="4" name="Рисунок 3"/>
-          <p:cNvPicPr>
-            <a:picLocks noChangeAspect="1"/>
-          </p:cNvPicPr>
-          <p:nvPr/>
-        </p:nvPicPr>
-        <p:blipFill>
-          <a:blip r:embed="rId3"/>
-          <a:stretch/>
-        </p:blipFill>
-        <p:spPr>
-          <a:xfrm>
-            <a:off x="523875" y="1328083"/>
-            <a:ext cx="8096250" cy="3049309"/>
-          </a:xfrm>
-          <a:prstGeom prst="rect">
-            <a:avLst/>
-          </a:prstGeom>
-        </p:spPr>
-      </p:pic>
     </p:spTree>
     <p:extLst>
       <p:ext uri="{BB962C8B-B14F-4D97-AF65-F5344CB8AC3E}">
-        <p14:creationId xmlns:p14="http://schemas.microsoft.com/office/powerpoint/2010/main" val="378756689"/>
+        <p14:creationId xmlns:p14="http://schemas.microsoft.com/office/powerpoint/2010/main" val="1932806430"/>
       </p:ext>
     </p:extLst>
   </p:cSld>
@@ -25538,8 +25205,8 @@
         </p:blipFill>
         <p:spPr>
           <a:xfrm>
-            <a:off x="952500" y="1624120"/>
-            <a:ext cx="7239000" cy="2371510"/>
+            <a:off x="1428750" y="1844877"/>
+            <a:ext cx="6286500" cy="1929996"/>
           </a:xfrm>
           <a:prstGeom prst="rect">
             <a:avLst/>
@@ -25551,7 +25218,7 @@
           <p:cNvPr id="2" name="slide-title">
             <a:extLst>
               <a:ext uri="{FF2B5EF4-FFF2-40B4-BE49-F238E27FC236}">
-                <a16:creationId xmlns:a16="http://schemas.microsoft.com/office/drawing/2014/main" id="{756AD2C2-2279-43DD-ABCB-567197FD97BF}"/>
+                <a16:creationId xmlns:a16="http://schemas.microsoft.com/office/drawing/2014/main" id="{49B82C0D-E5DA-42BE-80E6-842A8071824B}"/>
               </a:ext>
             </a:extLst>
           </p:cNvPr>
@@ -25591,7 +25258,7 @@
                   <a:srgbClr val="000000"/>
                 </a:solidFill>
               </a:rPr>
-              <a:t>Оформление заказа: проверка статуса</a:t>
+              <a:t>Создание счёта после регистрации</a:t>
             </a:r>
           </a:p>
         </p:txBody>
@@ -25599,7 +25266,7 @@
     </p:spTree>
     <p:extLst>
       <p:ext uri="{BB962C8B-B14F-4D97-AF65-F5344CB8AC3E}">
-        <p14:creationId xmlns:p14="http://schemas.microsoft.com/office/powerpoint/2010/main" val="1145137990"/>
+        <p14:creationId xmlns:p14="http://schemas.microsoft.com/office/powerpoint/2010/main" val="314297881"/>
       </p:ext>
     </p:extLst>
   </p:cSld>
